--- a/Mandats/Mandat_3/Présentation.pptx
+++ b/Mandats/Mandat_3/Présentation.pptx
@@ -26,6 +26,7 @@
     <p:sldId id="271" r:id="rId20"/>
     <p:sldId id="279" r:id="rId21"/>
     <p:sldId id="280" r:id="rId22"/>
+    <p:sldId id="281" r:id="rId23"/>
   </p:sldIdLst>
   <p:sldSz cx="12192000" cy="6858000"/>
   <p:notesSz cx="6858000" cy="9144000"/>
@@ -8068,51 +8069,16 @@
                   <a:schemeClr val="tx2"/>
                 </a:solidFill>
               </a:rPr>
-              <a:t>Par Xavier Pelletier,</a:t>
+              <a:t>Par Xavier Pelletier, Hichem Khederi,</a:t>
             </a:r>
           </a:p>
           <a:p>
             <a:pPr algn="l"/>
-            <a:r>
-              <a:rPr lang="en-US" sz="2000" dirty="0">
-                <a:solidFill>
-                  <a:schemeClr val="tx2"/>
-                </a:solidFill>
-              </a:rPr>
-              <a:t>[</a:t>
-            </a:r>
-            <a:r>
-              <a:rPr lang="en-US" sz="2000" dirty="0" err="1">
-                <a:solidFill>
-                  <a:schemeClr val="tx2"/>
-                </a:solidFill>
-              </a:rPr>
-              <a:t>Écrire</a:t>
-            </a:r>
-            <a:r>
-              <a:rPr lang="en-US" sz="2000" dirty="0">
-                <a:solidFill>
-                  <a:schemeClr val="tx2"/>
-                </a:solidFill>
-              </a:rPr>
-              <a:t> </a:t>
-            </a:r>
-            <a:r>
-              <a:rPr lang="en-US" sz="2000" dirty="0" err="1">
-                <a:solidFill>
-                  <a:schemeClr val="tx2"/>
-                </a:solidFill>
-              </a:rPr>
-              <a:t>vos</a:t>
-            </a:r>
-            <a:r>
-              <a:rPr lang="en-US" sz="2000" dirty="0">
-                <a:solidFill>
-                  <a:schemeClr val="tx2"/>
-                </a:solidFill>
-              </a:rPr>
-              <a:t> nom]</a:t>
-            </a:r>
+            <a:endParaRPr lang="en-US" sz="2000" dirty="0">
+              <a:solidFill>
+                <a:schemeClr val="tx2"/>
+              </a:solidFill>
+            </a:endParaRPr>
           </a:p>
         </p:txBody>
       </p:sp>
@@ -16510,7 +16476,7 @@
           <a:p>
             <a:pPr algn="ctr"/>
             <a:r>
-              <a:rPr lang="en-US" sz="3600" kern="1200">
+              <a:rPr lang="en-US" sz="3600" kern="1200" dirty="0">
                 <a:solidFill>
                   <a:srgbClr val="3F3F3F"/>
                 </a:solidFill>
@@ -16518,8 +16484,93 @@
                 <a:ea typeface="+mj-ea"/>
                 <a:cs typeface="+mj-cs"/>
               </a:rPr>
-              <a:t>La problématique que nous voulons réglé</a:t>
+              <a:t>La </a:t>
             </a:r>
+            <a:r>
+              <a:rPr lang="en-US" sz="3600" kern="1200" dirty="0" err="1">
+                <a:solidFill>
+                  <a:srgbClr val="3F3F3F"/>
+                </a:solidFill>
+                <a:latin typeface="+mj-lt"/>
+                <a:ea typeface="+mj-ea"/>
+                <a:cs typeface="+mj-cs"/>
+              </a:rPr>
+              <a:t>problématique</a:t>
+            </a:r>
+            <a:r>
+              <a:rPr lang="en-US" sz="3600" kern="1200" dirty="0">
+                <a:solidFill>
+                  <a:srgbClr val="3F3F3F"/>
+                </a:solidFill>
+                <a:latin typeface="+mj-lt"/>
+                <a:ea typeface="+mj-ea"/>
+                <a:cs typeface="+mj-cs"/>
+              </a:rPr>
+              <a:t> </a:t>
+            </a:r>
+            <a:r>
+              <a:rPr lang="en-US" sz="3600" kern="1200" dirty="0" err="1">
+                <a:solidFill>
+                  <a:srgbClr val="3F3F3F"/>
+                </a:solidFill>
+                <a:latin typeface="+mj-lt"/>
+                <a:ea typeface="+mj-ea"/>
+                <a:cs typeface="+mj-cs"/>
+              </a:rPr>
+              <a:t>que</a:t>
+            </a:r>
+            <a:r>
+              <a:rPr lang="en-US" sz="3600" kern="1200" dirty="0">
+                <a:solidFill>
+                  <a:srgbClr val="3F3F3F"/>
+                </a:solidFill>
+                <a:latin typeface="+mj-lt"/>
+                <a:ea typeface="+mj-ea"/>
+                <a:cs typeface="+mj-cs"/>
+              </a:rPr>
+              <a:t> nous </a:t>
+            </a:r>
+            <a:r>
+              <a:rPr lang="en-US" sz="3600" kern="1200" dirty="0" err="1">
+                <a:solidFill>
+                  <a:srgbClr val="3F3F3F"/>
+                </a:solidFill>
+                <a:latin typeface="+mj-lt"/>
+                <a:ea typeface="+mj-ea"/>
+                <a:cs typeface="+mj-cs"/>
+              </a:rPr>
+              <a:t>voulons</a:t>
+            </a:r>
+            <a:r>
+              <a:rPr lang="en-US" sz="3600" kern="1200" dirty="0">
+                <a:solidFill>
+                  <a:srgbClr val="3F3F3F"/>
+                </a:solidFill>
+                <a:latin typeface="+mj-lt"/>
+                <a:ea typeface="+mj-ea"/>
+                <a:cs typeface="+mj-cs"/>
+              </a:rPr>
+              <a:t> </a:t>
+            </a:r>
+            <a:r>
+              <a:rPr lang="en-US" sz="3600" kern="1200" dirty="0" err="1">
+                <a:solidFill>
+                  <a:srgbClr val="3F3F3F"/>
+                </a:solidFill>
+                <a:latin typeface="+mj-lt"/>
+                <a:ea typeface="+mj-ea"/>
+                <a:cs typeface="+mj-cs"/>
+              </a:rPr>
+              <a:t>réglé</a:t>
+            </a:r>
+            <a:endParaRPr lang="en-US" sz="3600" kern="1200" dirty="0">
+              <a:solidFill>
+                <a:srgbClr val="3F3F3F"/>
+              </a:solidFill>
+              <a:latin typeface="+mj-lt"/>
+              <a:ea typeface="+mj-ea"/>
+              <a:cs typeface="+mj-cs"/>
+            </a:endParaRPr>
           </a:p>
         </p:txBody>
       </p:sp>
@@ -23570,6 +23621,738 @@
 </p:sld>
 </file>
 
+<file path=ppt/slides/slide22.xml><?xml version="1.0" encoding="utf-8"?>
+<p:sld xmlns:a="http://schemas.openxmlformats.org/drawingml/2006/main" xmlns:r="http://schemas.openxmlformats.org/officeDocument/2006/relationships" xmlns:p="http://schemas.openxmlformats.org/presentationml/2006/main">
+  <p:cSld>
+    <p:bg>
+      <p:bgPr>
+        <a:solidFill>
+          <a:schemeClr val="bg1"/>
+        </a:solidFill>
+        <a:effectLst/>
+      </p:bgPr>
+    </p:bg>
+    <p:spTree>
+      <p:nvGrpSpPr>
+        <p:cNvPr id="1" name=""/>
+        <p:cNvGrpSpPr/>
+        <p:nvPr/>
+      </p:nvGrpSpPr>
+      <p:grpSpPr>
+        <a:xfrm>
+          <a:off x="0" y="0"/>
+          <a:ext cx="0" cy="0"/>
+          <a:chOff x="0" y="0"/>
+          <a:chExt cx="0" cy="0"/>
+        </a:xfrm>
+      </p:grpSpPr>
+      <p:sp useBgFill="1">
+        <p:nvSpPr>
+          <p:cNvPr id="8" name="Rectangle 7">
+            <a:extLst>
+              <a:ext uri="{FF2B5EF4-FFF2-40B4-BE49-F238E27FC236}">
+                <a16:creationId xmlns:a16="http://schemas.microsoft.com/office/drawing/2014/main" id="{09588DA8-065E-4F6F-8EFD-43104AB2E0CF}"/>
+              </a:ext>
+              <a:ext uri="{C183D7F6-B498-43B3-948B-1728B52AA6E4}">
+                <adec:decorative xmlns:adec="http://schemas.microsoft.com/office/drawing/2017/decorative" val="1"/>
+              </a:ext>
+            </a:extLst>
+          </p:cNvPr>
+          <p:cNvSpPr>
+            <a:spLocks noGrp="1" noRot="1" noChangeAspect="1" noMove="1" noResize="1" noEditPoints="1" noAdjustHandles="1" noChangeArrowheads="1" noChangeShapeType="1" noTextEdit="1"/>
+          </p:cNvSpPr>
+          <p:nvPr>
+            <p:extLst>
+              <p:ext uri="{386F3935-93C4-4BCD-93E2-E3B085C9AB24}">
+                <p16:designElem xmlns:p16="http://schemas.microsoft.com/office/powerpoint/2015/main" val="1"/>
+              </p:ext>
+            </p:extLst>
+          </p:nvPr>
+        </p:nvSpPr>
+        <p:spPr>
+          <a:xfrm>
+            <a:off x="0" y="0"/>
+            <a:ext cx="12192000" cy="6858000"/>
+          </a:xfrm>
+          <a:prstGeom prst="rect">
+            <a:avLst/>
+          </a:prstGeom>
+          <a:ln w="12700" cap="flat" cmpd="sng" algn="ctr">
+            <a:noFill/>
+            <a:prstDash val="solid"/>
+            <a:miter lim="800000"/>
+          </a:ln>
+          <a:effectLst/>
+          <a:extLst>
+            <a:ext uri="{91240B29-F687-4F45-9708-019B960494DF}">
+              <a14:hiddenLine xmlns:a14="http://schemas.microsoft.com/office/drawing/2010/main" w="12700" cap="flat" cmpd="sng" algn="ctr">
+                <a:solidFill>
+                  <a:schemeClr val="accent1">
+                    <a:shade val="50000"/>
+                  </a:schemeClr>
+                </a:solidFill>
+                <a:prstDash val="solid"/>
+                <a:miter lim="800000"/>
+              </a14:hiddenLine>
+            </a:ext>
+          </a:extLst>
+        </p:spPr>
+        <p:style>
+          <a:lnRef idx="2">
+            <a:schemeClr val="accent1">
+              <a:shade val="50000"/>
+            </a:schemeClr>
+          </a:lnRef>
+          <a:fillRef idx="1">
+            <a:schemeClr val="accent1"/>
+          </a:fillRef>
+          <a:effectRef idx="0">
+            <a:schemeClr val="accent1"/>
+          </a:effectRef>
+          <a:fontRef idx="minor">
+            <a:schemeClr val="lt1"/>
+          </a:fontRef>
+        </p:style>
+        <p:txBody>
+          <a:bodyPr rtlCol="0" anchor="ctr"/>
+          <a:lstStyle/>
+          <a:p>
+            <a:pPr algn="ctr"/>
+            <a:endParaRPr lang="en-US"/>
+          </a:p>
+        </p:txBody>
+      </p:sp>
+      <p:sp useBgFill="1">
+        <p:nvSpPr>
+          <p:cNvPr id="10" name="Rectangle 9">
+            <a:extLst>
+              <a:ext uri="{FF2B5EF4-FFF2-40B4-BE49-F238E27FC236}">
+                <a16:creationId xmlns:a16="http://schemas.microsoft.com/office/drawing/2014/main" id="{C4285719-470E-454C-AF62-8323075F1F5B}"/>
+              </a:ext>
+              <a:ext uri="{C183D7F6-B498-43B3-948B-1728B52AA6E4}">
+                <adec:decorative xmlns:adec="http://schemas.microsoft.com/office/drawing/2017/decorative" val="1"/>
+              </a:ext>
+            </a:extLst>
+          </p:cNvPr>
+          <p:cNvSpPr>
+            <a:spLocks noGrp="1" noRot="1" noChangeAspect="1" noMove="1" noResize="1" noEditPoints="1" noAdjustHandles="1" noChangeArrowheads="1" noChangeShapeType="1" noTextEdit="1"/>
+          </p:cNvSpPr>
+          <p:nvPr>
+            <p:extLst>
+              <p:ext uri="{386F3935-93C4-4BCD-93E2-E3B085C9AB24}">
+                <p16:designElem xmlns:p16="http://schemas.microsoft.com/office/powerpoint/2015/main" val="1"/>
+              </p:ext>
+            </p:extLst>
+          </p:nvPr>
+        </p:nvSpPr>
+        <p:spPr>
+          <a:xfrm>
+            <a:off x="0" y="0"/>
+            <a:ext cx="12188952" cy="6858000"/>
+          </a:xfrm>
+          <a:prstGeom prst="rect">
+            <a:avLst/>
+          </a:prstGeom>
+          <a:ln w="12700" cap="flat" cmpd="sng" algn="ctr">
+            <a:noFill/>
+            <a:prstDash val="solid"/>
+            <a:miter lim="800000"/>
+          </a:ln>
+          <a:effectLst/>
+          <a:extLst>
+            <a:ext uri="{91240B29-F687-4F45-9708-019B960494DF}">
+              <a14:hiddenLine xmlns:a14="http://schemas.microsoft.com/office/drawing/2010/main" w="12700" cap="flat" cmpd="sng" algn="ctr">
+                <a:solidFill>
+                  <a:schemeClr val="accent1">
+                    <a:shade val="50000"/>
+                  </a:schemeClr>
+                </a:solidFill>
+                <a:prstDash val="solid"/>
+                <a:miter lim="800000"/>
+              </a14:hiddenLine>
+            </a:ext>
+          </a:extLst>
+        </p:spPr>
+        <p:style>
+          <a:lnRef idx="2">
+            <a:schemeClr val="accent1">
+              <a:shade val="50000"/>
+            </a:schemeClr>
+          </a:lnRef>
+          <a:fillRef idx="1">
+            <a:schemeClr val="accent1"/>
+          </a:fillRef>
+          <a:effectRef idx="0">
+            <a:schemeClr val="accent1"/>
+          </a:effectRef>
+          <a:fontRef idx="minor">
+            <a:schemeClr val="lt1"/>
+          </a:fontRef>
+        </p:style>
+        <p:txBody>
+          <a:bodyPr rtlCol="0" anchor="ctr"/>
+          <a:lstStyle/>
+          <a:p>
+            <a:pPr algn="ctr"/>
+            <a:endParaRPr lang="en-US"/>
+          </a:p>
+        </p:txBody>
+      </p:sp>
+      <p:sp>
+        <p:nvSpPr>
+          <p:cNvPr id="12" name="Rectangle 11">
+            <a:extLst>
+              <a:ext uri="{FF2B5EF4-FFF2-40B4-BE49-F238E27FC236}">
+                <a16:creationId xmlns:a16="http://schemas.microsoft.com/office/drawing/2014/main" id="{CD9FE4EF-C4D8-49A0-B2FF-81D8DB7D8A24}"/>
+              </a:ext>
+              <a:ext uri="{C183D7F6-B498-43B3-948B-1728B52AA6E4}">
+                <adec:decorative xmlns:adec="http://schemas.microsoft.com/office/drawing/2017/decorative" val="1"/>
+              </a:ext>
+            </a:extLst>
+          </p:cNvPr>
+          <p:cNvSpPr>
+            <a:spLocks noGrp="1" noRot="1" noChangeAspect="1" noMove="1" noResize="1" noEditPoints="1" noAdjustHandles="1" noChangeArrowheads="1" noChangeShapeType="1" noTextEdit="1"/>
+          </p:cNvSpPr>
+          <p:nvPr>
+            <p:extLst>
+              <p:ext uri="{386F3935-93C4-4BCD-93E2-E3B085C9AB24}">
+                <p16:designElem xmlns:p16="http://schemas.microsoft.com/office/powerpoint/2015/main" val="1"/>
+              </p:ext>
+            </p:extLst>
+          </p:nvPr>
+        </p:nvSpPr>
+        <p:spPr>
+          <a:xfrm rot="5400000" flipH="1">
+            <a:off x="-1410084" y="1410082"/>
+            <a:ext cx="6858000" cy="4037836"/>
+          </a:xfrm>
+          <a:prstGeom prst="rect">
+            <a:avLst/>
+          </a:prstGeom>
+          <a:gradFill>
+            <a:gsLst>
+              <a:gs pos="8000">
+                <a:srgbClr val="000000"/>
+              </a:gs>
+              <a:gs pos="100000">
+                <a:schemeClr val="accent1">
+                  <a:lumMod val="75000"/>
+                </a:schemeClr>
+              </a:gs>
+            </a:gsLst>
+            <a:lin ang="3000000" scaled="0"/>
+          </a:gradFill>
+          <a:ln>
+            <a:noFill/>
+          </a:ln>
+        </p:spPr>
+        <p:style>
+          <a:lnRef idx="2">
+            <a:schemeClr val="accent1">
+              <a:shade val="50000"/>
+            </a:schemeClr>
+          </a:lnRef>
+          <a:fillRef idx="1">
+            <a:schemeClr val="accent1"/>
+          </a:fillRef>
+          <a:effectRef idx="0">
+            <a:schemeClr val="accent1"/>
+          </a:effectRef>
+          <a:fontRef idx="minor">
+            <a:schemeClr val="lt1"/>
+          </a:fontRef>
+        </p:style>
+        <p:txBody>
+          <a:bodyPr rtlCol="0" anchor="ctr"/>
+          <a:lstStyle/>
+          <a:p>
+            <a:pPr algn="ctr"/>
+            <a:endParaRPr lang="en-US"/>
+          </a:p>
+        </p:txBody>
+      </p:sp>
+      <p:sp>
+        <p:nvSpPr>
+          <p:cNvPr id="14" name="Rectangle 13">
+            <a:extLst>
+              <a:ext uri="{FF2B5EF4-FFF2-40B4-BE49-F238E27FC236}">
+                <a16:creationId xmlns:a16="http://schemas.microsoft.com/office/drawing/2014/main" id="{4300840D-0A0B-4512-BACA-B439D5B9C57C}"/>
+              </a:ext>
+              <a:ext uri="{C183D7F6-B498-43B3-948B-1728B52AA6E4}">
+                <adec:decorative xmlns:adec="http://schemas.microsoft.com/office/drawing/2017/decorative" val="1"/>
+              </a:ext>
+            </a:extLst>
+          </p:cNvPr>
+          <p:cNvSpPr>
+            <a:spLocks noGrp="1" noRot="1" noChangeAspect="1" noMove="1" noResize="1" noEditPoints="1" noAdjustHandles="1" noChangeArrowheads="1" noChangeShapeType="1" noTextEdit="1"/>
+          </p:cNvSpPr>
+          <p:nvPr>
+            <p:extLst>
+              <p:ext uri="{386F3935-93C4-4BCD-93E2-E3B085C9AB24}">
+                <p16:designElem xmlns:p16="http://schemas.microsoft.com/office/powerpoint/2015/main" val="1"/>
+              </p:ext>
+            </p:extLst>
+          </p:nvPr>
+        </p:nvSpPr>
+        <p:spPr>
+          <a:xfrm rot="5400000" flipH="1">
+            <a:off x="-1410085" y="1420219"/>
+            <a:ext cx="6857999" cy="4037839"/>
+          </a:xfrm>
+          <a:prstGeom prst="rect">
+            <a:avLst/>
+          </a:prstGeom>
+          <a:gradFill>
+            <a:gsLst>
+              <a:gs pos="0">
+                <a:srgbClr val="000000">
+                  <a:alpha val="0"/>
+                </a:srgbClr>
+              </a:gs>
+              <a:gs pos="99000">
+                <a:schemeClr val="accent1">
+                  <a:alpha val="46000"/>
+                </a:schemeClr>
+              </a:gs>
+            </a:gsLst>
+            <a:lin ang="1800000" scaled="0"/>
+          </a:gradFill>
+          <a:ln>
+            <a:noFill/>
+          </a:ln>
+        </p:spPr>
+        <p:style>
+          <a:lnRef idx="2">
+            <a:schemeClr val="accent1">
+              <a:shade val="50000"/>
+            </a:schemeClr>
+          </a:lnRef>
+          <a:fillRef idx="1">
+            <a:schemeClr val="accent1"/>
+          </a:fillRef>
+          <a:effectRef idx="0">
+            <a:schemeClr val="accent1"/>
+          </a:effectRef>
+          <a:fontRef idx="minor">
+            <a:schemeClr val="lt1"/>
+          </a:fontRef>
+        </p:style>
+        <p:txBody>
+          <a:bodyPr rtlCol="0" anchor="ctr"/>
+          <a:lstStyle/>
+          <a:p>
+            <a:pPr algn="ctr"/>
+            <a:endParaRPr lang="en-US"/>
+          </a:p>
+        </p:txBody>
+      </p:sp>
+      <p:sp>
+        <p:nvSpPr>
+          <p:cNvPr id="16" name="Rectangle 15">
+            <a:extLst>
+              <a:ext uri="{FF2B5EF4-FFF2-40B4-BE49-F238E27FC236}">
+                <a16:creationId xmlns:a16="http://schemas.microsoft.com/office/drawing/2014/main" id="{D2B78728-A580-49A7-84F9-6EF6F583ADE0}"/>
+              </a:ext>
+              <a:ext uri="{C183D7F6-B498-43B3-948B-1728B52AA6E4}">
+                <adec:decorative xmlns:adec="http://schemas.microsoft.com/office/drawing/2017/decorative" val="1"/>
+              </a:ext>
+            </a:extLst>
+          </p:cNvPr>
+          <p:cNvSpPr>
+            <a:spLocks noGrp="1" noRot="1" noChangeAspect="1" noMove="1" noResize="1" noEditPoints="1" noAdjustHandles="1" noChangeArrowheads="1" noChangeShapeType="1" noTextEdit="1"/>
+          </p:cNvSpPr>
+          <p:nvPr>
+            <p:extLst>
+              <p:ext uri="{386F3935-93C4-4BCD-93E2-E3B085C9AB24}">
+                <p16:designElem xmlns:p16="http://schemas.microsoft.com/office/powerpoint/2015/main" val="1"/>
+              </p:ext>
+            </p:extLst>
+          </p:nvPr>
+        </p:nvSpPr>
+        <p:spPr>
+          <a:xfrm rot="5400000" flipH="1">
+            <a:off x="767923" y="3588085"/>
+            <a:ext cx="2501979" cy="4037841"/>
+          </a:xfrm>
+          <a:prstGeom prst="rect">
+            <a:avLst/>
+          </a:prstGeom>
+          <a:gradFill>
+            <a:gsLst>
+              <a:gs pos="2000">
+                <a:schemeClr val="accent1">
+                  <a:alpha val="29000"/>
+                </a:schemeClr>
+              </a:gs>
+              <a:gs pos="100000">
+                <a:srgbClr val="000000">
+                  <a:alpha val="30000"/>
+                </a:srgbClr>
+              </a:gs>
+            </a:gsLst>
+            <a:lin ang="7800000" scaled="0"/>
+          </a:gradFill>
+          <a:ln>
+            <a:noFill/>
+          </a:ln>
+        </p:spPr>
+        <p:style>
+          <a:lnRef idx="2">
+            <a:schemeClr val="accent1">
+              <a:shade val="50000"/>
+            </a:schemeClr>
+          </a:lnRef>
+          <a:fillRef idx="1">
+            <a:schemeClr val="accent1"/>
+          </a:fillRef>
+          <a:effectRef idx="0">
+            <a:schemeClr val="accent1"/>
+          </a:effectRef>
+          <a:fontRef idx="minor">
+            <a:schemeClr val="lt1"/>
+          </a:fontRef>
+        </p:style>
+        <p:txBody>
+          <a:bodyPr rtlCol="0" anchor="ctr"/>
+          <a:lstStyle/>
+          <a:p>
+            <a:pPr algn="ctr"/>
+            <a:endParaRPr lang="en-US" dirty="0"/>
+          </a:p>
+        </p:txBody>
+      </p:sp>
+      <p:sp>
+        <p:nvSpPr>
+          <p:cNvPr id="18" name="Freeform: Shape 17">
+            <a:extLst>
+              <a:ext uri="{FF2B5EF4-FFF2-40B4-BE49-F238E27FC236}">
+                <a16:creationId xmlns:a16="http://schemas.microsoft.com/office/drawing/2014/main" id="{38FAA1A1-D861-433F-88FA-1E9D6FD31D11}"/>
+              </a:ext>
+              <a:ext uri="{C183D7F6-B498-43B3-948B-1728B52AA6E4}">
+                <adec:decorative xmlns:adec="http://schemas.microsoft.com/office/drawing/2017/decorative" val="1"/>
+              </a:ext>
+            </a:extLst>
+          </p:cNvPr>
+          <p:cNvSpPr>
+            <a:spLocks noGrp="1" noRot="1" noChangeAspect="1" noMove="1" noResize="1" noEditPoints="1" noAdjustHandles="1" noChangeArrowheads="1" noChangeShapeType="1" noTextEdit="1"/>
+          </p:cNvSpPr>
+          <p:nvPr>
+            <p:extLst>
+              <p:ext uri="{386F3935-93C4-4BCD-93E2-E3B085C9AB24}">
+                <p16:designElem xmlns:p16="http://schemas.microsoft.com/office/powerpoint/2015/main" val="1"/>
+              </p:ext>
+            </p:extLst>
+          </p:nvPr>
+        </p:nvSpPr>
+        <p:spPr>
+          <a:xfrm rot="20635413">
+            <a:off x="-501737" y="969718"/>
+            <a:ext cx="3900357" cy="4178958"/>
+          </a:xfrm>
+          <a:custGeom>
+            <a:avLst/>
+            <a:gdLst>
+              <a:gd name="connsiteX0" fmla="*/ 2432225 w 3900357"/>
+              <a:gd name="connsiteY0" fmla="*/ 93939 h 4178958"/>
+              <a:gd name="connsiteX1" fmla="*/ 3900357 w 3900357"/>
+              <a:gd name="connsiteY1" fmla="*/ 2089479 h 4178958"/>
+              <a:gd name="connsiteX2" fmla="*/ 1810878 w 3900357"/>
+              <a:gd name="connsiteY2" fmla="*/ 4178958 h 4178958"/>
+              <a:gd name="connsiteX3" fmla="*/ 78249 w 3900357"/>
+              <a:gd name="connsiteY3" fmla="*/ 3257727 h 4178958"/>
+              <a:gd name="connsiteX4" fmla="*/ 0 w 3900357"/>
+              <a:gd name="connsiteY4" fmla="*/ 3128923 h 4178958"/>
+              <a:gd name="connsiteX5" fmla="*/ 831324 w 3900357"/>
+              <a:gd name="connsiteY5" fmla="*/ 244281 h 4178958"/>
+              <a:gd name="connsiteX6" fmla="*/ 997559 w 3900357"/>
+              <a:gd name="connsiteY6" fmla="*/ 164202 h 4178958"/>
+              <a:gd name="connsiteX7" fmla="*/ 1810878 w 3900357"/>
+              <a:gd name="connsiteY7" fmla="*/ 0 h 4178958"/>
+              <a:gd name="connsiteX8" fmla="*/ 2432225 w 3900357"/>
+              <a:gd name="connsiteY8" fmla="*/ 93939 h 4178958"/>
+            </a:gdLst>
+            <a:ahLst/>
+            <a:cxnLst>
+              <a:cxn ang="0">
+                <a:pos x="connsiteX0" y="connsiteY0"/>
+              </a:cxn>
+              <a:cxn ang="0">
+                <a:pos x="connsiteX1" y="connsiteY1"/>
+              </a:cxn>
+              <a:cxn ang="0">
+                <a:pos x="connsiteX2" y="connsiteY2"/>
+              </a:cxn>
+              <a:cxn ang="0">
+                <a:pos x="connsiteX3" y="connsiteY3"/>
+              </a:cxn>
+              <a:cxn ang="0">
+                <a:pos x="connsiteX4" y="connsiteY4"/>
+              </a:cxn>
+              <a:cxn ang="0">
+                <a:pos x="connsiteX5" y="connsiteY5"/>
+              </a:cxn>
+              <a:cxn ang="0">
+                <a:pos x="connsiteX6" y="connsiteY6"/>
+              </a:cxn>
+              <a:cxn ang="0">
+                <a:pos x="connsiteX7" y="connsiteY7"/>
+              </a:cxn>
+              <a:cxn ang="0">
+                <a:pos x="connsiteX8" y="connsiteY8"/>
+              </a:cxn>
+            </a:cxnLst>
+            <a:rect l="l" t="t" r="r" b="b"/>
+            <a:pathLst>
+              <a:path w="3900357" h="4178958">
+                <a:moveTo>
+                  <a:pt x="2432225" y="93939"/>
+                </a:moveTo>
+                <a:cubicBezTo>
+                  <a:pt x="3282786" y="358491"/>
+                  <a:pt x="3900357" y="1151865"/>
+                  <a:pt x="3900357" y="2089479"/>
+                </a:cubicBezTo>
+                <a:cubicBezTo>
+                  <a:pt x="3900357" y="3243466"/>
+                  <a:pt x="2964865" y="4178958"/>
+                  <a:pt x="1810878" y="4178958"/>
+                </a:cubicBezTo>
+                <a:cubicBezTo>
+                  <a:pt x="1089636" y="4178958"/>
+                  <a:pt x="453744" y="3813531"/>
+                  <a:pt x="78249" y="3257727"/>
+                </a:cubicBezTo>
+                <a:lnTo>
+                  <a:pt x="0" y="3128923"/>
+                </a:lnTo>
+                <a:lnTo>
+                  <a:pt x="831324" y="244281"/>
+                </a:lnTo>
+                <a:lnTo>
+                  <a:pt x="997559" y="164202"/>
+                </a:lnTo>
+                <a:cubicBezTo>
+                  <a:pt x="1247540" y="58468"/>
+                  <a:pt x="1522381" y="0"/>
+                  <a:pt x="1810878" y="0"/>
+                </a:cubicBezTo>
+                <a:cubicBezTo>
+                  <a:pt x="2027251" y="0"/>
+                  <a:pt x="2235942" y="32888"/>
+                  <a:pt x="2432225" y="93939"/>
+                </a:cubicBezTo>
+                <a:close/>
+              </a:path>
+            </a:pathLst>
+          </a:custGeom>
+          <a:gradFill>
+            <a:gsLst>
+              <a:gs pos="29000">
+                <a:srgbClr val="000000">
+                  <a:alpha val="0"/>
+                </a:srgbClr>
+              </a:gs>
+              <a:gs pos="100000">
+                <a:schemeClr val="accent1">
+                  <a:alpha val="43000"/>
+                </a:schemeClr>
+              </a:gs>
+            </a:gsLst>
+            <a:lin ang="1800000" scaled="0"/>
+          </a:gradFill>
+          <a:ln>
+            <a:noFill/>
+          </a:ln>
+        </p:spPr>
+        <p:style>
+          <a:lnRef idx="2">
+            <a:schemeClr val="accent1">
+              <a:shade val="50000"/>
+            </a:schemeClr>
+          </a:lnRef>
+          <a:fillRef idx="1">
+            <a:schemeClr val="accent1"/>
+          </a:fillRef>
+          <a:effectRef idx="0">
+            <a:schemeClr val="accent1"/>
+          </a:effectRef>
+          <a:fontRef idx="minor">
+            <a:schemeClr val="lt1"/>
+          </a:fontRef>
+        </p:style>
+        <p:txBody>
+          <a:bodyPr wrap="square" rtlCol="0" anchor="ctr">
+            <a:noAutofit/>
+          </a:bodyPr>
+          <a:lstStyle/>
+          <a:p>
+            <a:pPr algn="ctr"/>
+            <a:endParaRPr lang="en-US" dirty="0"/>
+          </a:p>
+        </p:txBody>
+      </p:sp>
+      <p:sp>
+        <p:nvSpPr>
+          <p:cNvPr id="20" name="Rectangle 19">
+            <a:extLst>
+              <a:ext uri="{FF2B5EF4-FFF2-40B4-BE49-F238E27FC236}">
+                <a16:creationId xmlns:a16="http://schemas.microsoft.com/office/drawing/2014/main" id="{8D71EDA1-87BF-4D5D-AB79-F346FD19278A}"/>
+              </a:ext>
+              <a:ext uri="{C183D7F6-B498-43B3-948B-1728B52AA6E4}">
+                <adec:decorative xmlns:adec="http://schemas.microsoft.com/office/drawing/2017/decorative" val="1"/>
+              </a:ext>
+            </a:extLst>
+          </p:cNvPr>
+          <p:cNvSpPr>
+            <a:spLocks noGrp="1" noRot="1" noChangeAspect="1" noMove="1" noResize="1" noEditPoints="1" noAdjustHandles="1" noChangeArrowheads="1" noChangeShapeType="1" noTextEdit="1"/>
+          </p:cNvSpPr>
+          <p:nvPr>
+            <p:extLst>
+              <p:ext uri="{386F3935-93C4-4BCD-93E2-E3B085C9AB24}">
+                <p16:designElem xmlns:p16="http://schemas.microsoft.com/office/powerpoint/2015/main" val="1"/>
+              </p:ext>
+            </p:extLst>
+          </p:nvPr>
+        </p:nvSpPr>
+        <p:spPr>
+          <a:xfrm rot="5400000" flipH="1">
+            <a:off x="-1410093" y="1399943"/>
+            <a:ext cx="6858003" cy="4037835"/>
+          </a:xfrm>
+          <a:prstGeom prst="rect">
+            <a:avLst/>
+          </a:prstGeom>
+          <a:gradFill>
+            <a:gsLst>
+              <a:gs pos="0">
+                <a:srgbClr val="000000">
+                  <a:alpha val="0"/>
+                </a:srgbClr>
+              </a:gs>
+              <a:gs pos="99000">
+                <a:schemeClr val="accent1">
+                  <a:lumMod val="60000"/>
+                  <a:lumOff val="40000"/>
+                  <a:alpha val="11000"/>
+                </a:schemeClr>
+              </a:gs>
+            </a:gsLst>
+            <a:lin ang="7200000" scaled="0"/>
+          </a:gradFill>
+          <a:ln>
+            <a:noFill/>
+          </a:ln>
+        </p:spPr>
+        <p:style>
+          <a:lnRef idx="2">
+            <a:schemeClr val="accent1">
+              <a:shade val="50000"/>
+            </a:schemeClr>
+          </a:lnRef>
+          <a:fillRef idx="1">
+            <a:schemeClr val="accent1"/>
+          </a:fillRef>
+          <a:effectRef idx="0">
+            <a:schemeClr val="accent1"/>
+          </a:effectRef>
+          <a:fontRef idx="minor">
+            <a:schemeClr val="lt1"/>
+          </a:fontRef>
+        </p:style>
+        <p:txBody>
+          <a:bodyPr rtlCol="0" anchor="ctr"/>
+          <a:lstStyle/>
+          <a:p>
+            <a:pPr algn="ctr"/>
+            <a:endParaRPr lang="en-US"/>
+          </a:p>
+        </p:txBody>
+      </p:sp>
+      <p:sp>
+        <p:nvSpPr>
+          <p:cNvPr id="2" name="Titre 1">
+            <a:extLst>
+              <a:ext uri="{FF2B5EF4-FFF2-40B4-BE49-F238E27FC236}">
+                <a16:creationId xmlns:a16="http://schemas.microsoft.com/office/drawing/2014/main" id="{5E1A3504-3D36-4373-DB6B-0A5B4CF572FA}"/>
+              </a:ext>
+            </a:extLst>
+          </p:cNvPr>
+          <p:cNvSpPr>
+            <a:spLocks noGrp="1"/>
+          </p:cNvSpPr>
+          <p:nvPr>
+            <p:ph type="title"/>
+          </p:nvPr>
+        </p:nvSpPr>
+        <p:spPr>
+          <a:xfrm>
+            <a:off x="466722" y="586855"/>
+            <a:ext cx="3201366" cy="3387497"/>
+          </a:xfrm>
+        </p:spPr>
+        <p:txBody>
+          <a:bodyPr anchor="b">
+            <a:normAutofit/>
+          </a:bodyPr>
+          <a:lstStyle/>
+          <a:p>
+            <a:pPr algn="r"/>
+            <a:r>
+              <a:rPr lang="fr-CA" sz="4000" dirty="0">
+                <a:solidFill>
+                  <a:srgbClr val="FFFFFF"/>
+                </a:solidFill>
+              </a:rPr>
+              <a:t>Améliorations possibles</a:t>
+            </a:r>
+          </a:p>
+        </p:txBody>
+      </p:sp>
+      <p:sp>
+        <p:nvSpPr>
+          <p:cNvPr id="3" name="Espace réservé du contenu 2">
+            <a:extLst>
+              <a:ext uri="{FF2B5EF4-FFF2-40B4-BE49-F238E27FC236}">
+                <a16:creationId xmlns:a16="http://schemas.microsoft.com/office/drawing/2014/main" id="{5F813290-1677-6F1D-85F5-DD9DF40B2908}"/>
+              </a:ext>
+            </a:extLst>
+          </p:cNvPr>
+          <p:cNvSpPr>
+            <a:spLocks noGrp="1"/>
+          </p:cNvSpPr>
+          <p:nvPr>
+            <p:ph idx="1"/>
+          </p:nvPr>
+        </p:nvSpPr>
+        <p:spPr>
+          <a:xfrm>
+            <a:off x="4810259" y="649480"/>
+            <a:ext cx="6555347" cy="5546047"/>
+          </a:xfrm>
+        </p:spPr>
+        <p:txBody>
+          <a:bodyPr anchor="ctr">
+            <a:normAutofit/>
+          </a:bodyPr>
+          <a:lstStyle/>
+          <a:p>
+            <a:endParaRPr lang="fr-CA" sz="2000"/>
+          </a:p>
+        </p:txBody>
+      </p:sp>
+    </p:spTree>
+    <p:extLst>
+      <p:ext uri="{BB962C8B-B14F-4D97-AF65-F5344CB8AC3E}">
+        <p14:creationId xmlns:p14="http://schemas.microsoft.com/office/powerpoint/2010/main" val="74909326"/>
+      </p:ext>
+    </p:extLst>
+  </p:cSld>
+  <p:clrMapOvr>
+    <a:masterClrMapping/>
+  </p:clrMapOvr>
+</p:sld>
+</file>
+
 <file path=ppt/slides/slide3.xml><?xml version="1.0" encoding="utf-8"?>
 <p:sld xmlns:a="http://schemas.openxmlformats.org/drawingml/2006/main" xmlns:r="http://schemas.openxmlformats.org/officeDocument/2006/relationships" xmlns:p="http://schemas.openxmlformats.org/presentationml/2006/main">
   <p:cSld>
@@ -30435,12 +31218,28 @@
           <a:lstStyle/>
           <a:p>
             <a:r>
-              <a:rPr lang="en-US" sz="5000">
+              <a:rPr lang="en-US" sz="5000" dirty="0">
                 <a:solidFill>
                   <a:schemeClr val="bg1"/>
                 </a:solidFill>
               </a:rPr>
-              <a:t>Preview de notre site</a:t>
+              <a:t>Aperçu de </a:t>
+            </a:r>
+            <a:r>
+              <a:rPr lang="en-US" sz="5000" dirty="0" err="1">
+                <a:solidFill>
+                  <a:schemeClr val="bg1"/>
+                </a:solidFill>
+              </a:rPr>
+              <a:t>notre</a:t>
+            </a:r>
+            <a:r>
+              <a:rPr lang="en-US" sz="5000" dirty="0">
+                <a:solidFill>
+                  <a:schemeClr val="bg1"/>
+                </a:solidFill>
+              </a:rPr>
+              <a:t> site</a:t>
             </a:r>
           </a:p>
         </p:txBody>

--- a/Mandats/Mandat_3/Présentation.pptx
+++ b/Mandats/Mandat_3/Présentation.pptx
@@ -9276,7 +9276,39 @@
                   <a:schemeClr val="tx2"/>
                 </a:solidFill>
               </a:rPr>
-              <a:t>Par Xavier Pelletier, Hichem Khederi,</a:t>
+              <a:t>Par Xavier Pelletier, Hichem </a:t>
+            </a:r>
+            <a:r>
+              <a:rPr lang="en-US" sz="2000" dirty="0" err="1">
+                <a:solidFill>
+                  <a:schemeClr val="tx2"/>
+                </a:solidFill>
+              </a:rPr>
+              <a:t>Khederi</a:t>
+            </a:r>
+            <a:r>
+              <a:rPr lang="en-US" sz="2000" dirty="0">
+                <a:solidFill>
+                  <a:schemeClr val="tx2"/>
+                </a:solidFill>
+              </a:rPr>
+              <a:t>, Eric Djiben, </a:t>
+            </a:r>
+            <a:r>
+              <a:rPr lang="en-US" sz="2000" dirty="0" err="1">
+                <a:solidFill>
+                  <a:schemeClr val="tx2"/>
+                </a:solidFill>
+              </a:rPr>
+              <a:t>Glodie</a:t>
+            </a:r>
+            <a:r>
+              <a:rPr lang="en-US" sz="2000" dirty="0">
+                <a:solidFill>
+                  <a:schemeClr val="tx2"/>
+                </a:solidFill>
+              </a:rPr>
+              <a:t> Katanga</a:t>
             </a:r>
           </a:p>
           <a:p>
@@ -20412,24 +20444,40 @@
           <a:lstStyle/>
           <a:p>
             <a:r>
-              <a:rPr lang="fr-CA" sz="2000"/>
-              <a:t>SQLite avec Knex pour l’accès et l’initialisation du schéma.</a:t>
+              <a:rPr lang="fr-CA" sz="2000" dirty="0"/>
+              <a:t>SQLite avec </a:t>
+            </a:r>
+            <a:r>
+              <a:rPr lang="fr-CA" sz="2000" dirty="0" err="1"/>
+              <a:t>Knex</a:t>
+            </a:r>
+            <a:r>
+              <a:rPr lang="fr-CA" sz="2000" dirty="0"/>
+              <a:t> pour l’accès et l’initialisation du schéma.</a:t>
             </a:r>
           </a:p>
           <a:p>
             <a:r>
-              <a:rPr lang="fr-CA" sz="2000"/>
-              <a:t>Modèle relationnel autour des entités clés: client, utilisateur, admin, dossier, type_demande, facture, document, note.</a:t>
+              <a:rPr lang="fr-CA" sz="2000" dirty="0"/>
+              <a:t>Modèle relationnel autour des entités clés: client, utilisateur, admin, dossier, </a:t>
+            </a:r>
+            <a:r>
+              <a:rPr lang="fr-CA" sz="2000" dirty="0" err="1"/>
+              <a:t>type_demande</a:t>
+            </a:r>
+            <a:r>
+              <a:rPr lang="fr-CA" sz="2000" dirty="0"/>
+              <a:t>, facture, document, note.</a:t>
             </a:r>
           </a:p>
           <a:p>
             <a:r>
-              <a:rPr lang="fr-CA" sz="2000"/>
+              <a:rPr lang="fr-CA" sz="2000" dirty="0"/>
               <a:t>Initialisation automatique des tables au démarrage du serveur.</a:t>
             </a:r>
           </a:p>
           <a:p>
-            <a:endParaRPr lang="fr-CA" sz="2000"/>
+            <a:endParaRPr lang="fr-CA" sz="2000" dirty="0"/>
           </a:p>
         </p:txBody>
       </p:sp>
@@ -23851,7 +23899,7 @@
           <a:p>
             <a:pPr algn="r"/>
             <a:r>
-              <a:rPr lang="fr-CA" sz="4000">
+              <a:rPr lang="fr-CA" sz="4000" dirty="0">
                 <a:solidFill>
                   <a:srgbClr val="FFFFFF"/>
                 </a:solidFill>
@@ -23859,13 +23907,13 @@
               <a:t>Architecture monolithique full-stack</a:t>
             </a:r>
             <a:br>
-              <a:rPr lang="fr-CA" sz="4000">
+              <a:rPr lang="fr-CA" sz="4000" dirty="0">
                 <a:solidFill>
                   <a:srgbClr val="FFFFFF"/>
                 </a:solidFill>
               </a:rPr>
             </a:br>
-            <a:endParaRPr lang="fr-CA" sz="4000">
+            <a:endParaRPr lang="fr-CA" sz="4000" dirty="0">
               <a:solidFill>
                 <a:srgbClr val="FFFFFF"/>
               </a:solidFill>
@@ -23902,18 +23950,26 @@
           <a:lstStyle/>
           <a:p>
             <a:r>
-              <a:rPr lang="fr-CA" sz="2000"/>
-              <a:t>Un seul backend Express qui sert l’API et peut aussi servir le build frontend.</a:t>
+              <a:rPr lang="fr-CA" sz="2000" dirty="0"/>
+              <a:t>Un seul backend Express qui sert l’API et peut aussi servir le </a:t>
+            </a:r>
+            <a:r>
+              <a:rPr lang="fr-CA" sz="2000" dirty="0" err="1"/>
+              <a:t>build</a:t>
+            </a:r>
+            <a:r>
+              <a:rPr lang="fr-CA" sz="2000" dirty="0"/>
+              <a:t> frontend.</a:t>
             </a:r>
           </a:p>
           <a:p>
             <a:r>
-              <a:rPr lang="fr-CA" sz="2000"/>
+              <a:rPr lang="fr-CA" sz="2000" dirty="0"/>
               <a:t>Choix simple à déployer et adapté à un projet académique/PME.</a:t>
             </a:r>
           </a:p>
           <a:p>
-            <a:endParaRPr lang="fr-CA" sz="2000"/>
+            <a:endParaRPr lang="fr-CA" sz="2000" dirty="0"/>
           </a:p>
         </p:txBody>
       </p:sp>

--- a/Mandats/Mandat_3/Présentation.pptx
+++ b/Mandats/Mandat_3/Présentation.pptx
@@ -15208,6 +15208,42 @@
           <a:chExt cx="0" cy="0"/>
         </a:xfrm>
       </p:grpSpPr>
+      <p:pic>
+        <p:nvPicPr>
+          <p:cNvPr id="3" name="Image 2">
+            <a:extLst>
+              <a:ext uri="{FF2B5EF4-FFF2-40B4-BE49-F238E27FC236}">
+                <a16:creationId xmlns:a16="http://schemas.microsoft.com/office/drawing/2014/main" id="{87E841F7-DE75-00D9-BED4-E9441C842E61}"/>
+              </a:ext>
+            </a:extLst>
+          </p:cNvPr>
+          <p:cNvPicPr>
+            <a:picLocks noChangeAspect="1"/>
+          </p:cNvPicPr>
+          <p:nvPr/>
+        </p:nvPicPr>
+        <p:blipFill>
+          <a:blip r:embed="rId6">
+            <a:extLst>
+              <a:ext uri="{28A0092B-C50C-407E-A947-70E740481C1C}">
+                <a14:useLocalDpi xmlns:a14="http://schemas.microsoft.com/office/drawing/2010/main" val="0"/>
+              </a:ext>
+            </a:extLst>
+          </a:blip>
+          <a:stretch>
+            <a:fillRect/>
+          </a:stretch>
+        </p:blipFill>
+        <p:spPr>
+          <a:xfrm>
+            <a:off x="0" y="0"/>
+            <a:ext cx="12192000" cy="6851647"/>
+          </a:xfrm>
+          <a:prstGeom prst="rect">
+            <a:avLst/>
+          </a:prstGeom>
+        </p:spPr>
+      </p:pic>
       <p:sp>
         <p:nvSpPr>
           <p:cNvPr id="25" name="Freeform 24">
@@ -16398,6 +16434,42 @@
           <a:chExt cx="0" cy="0"/>
         </a:xfrm>
       </p:grpSpPr>
+      <p:pic>
+        <p:nvPicPr>
+          <p:cNvPr id="3" name="Image 2">
+            <a:extLst>
+              <a:ext uri="{FF2B5EF4-FFF2-40B4-BE49-F238E27FC236}">
+                <a16:creationId xmlns:a16="http://schemas.microsoft.com/office/drawing/2014/main" id="{868E622A-5241-C077-DD1D-E252605AA794}"/>
+              </a:ext>
+            </a:extLst>
+          </p:cNvPr>
+          <p:cNvPicPr>
+            <a:picLocks noChangeAspect="1"/>
+          </p:cNvPicPr>
+          <p:nvPr/>
+        </p:nvPicPr>
+        <p:blipFill>
+          <a:blip r:embed="rId6">
+            <a:extLst>
+              <a:ext uri="{28A0092B-C50C-407E-A947-70E740481C1C}">
+                <a14:useLocalDpi xmlns:a14="http://schemas.microsoft.com/office/drawing/2010/main" val="0"/>
+              </a:ext>
+            </a:extLst>
+          </a:blip>
+          <a:stretch>
+            <a:fillRect/>
+          </a:stretch>
+        </p:blipFill>
+        <p:spPr>
+          <a:xfrm>
+            <a:off x="0" y="1"/>
+            <a:ext cx="12192000" cy="6858000"/>
+          </a:xfrm>
+          <a:prstGeom prst="rect">
+            <a:avLst/>
+          </a:prstGeom>
+        </p:spPr>
+      </p:pic>
       <p:sp>
         <p:nvSpPr>
           <p:cNvPr id="25" name="Freeform 24">
